--- a/Sales Performance Dashboard.pptx
+++ b/Sales Performance Dashboard.pptx
@@ -109,6 +109,11 @@
       </a:defRPr>
     </a:lvl9pPr>
   </p:defaultTextStyle>
+  <p:extLst>
+    <p:ext uri="{EFAFB233-063F-42B5-8137-9DF3F51BA10A}">
+      <p15:sldGuideLst xmlns:p15="http://schemas.microsoft.com/office/powerpoint/2012/main"/>
+    </p:ext>
+  </p:extLst>
 </p:presentation>
 </file>
 
@@ -6539,15 +6544,15 @@
               </a:ext>
             </a:extLst>
           </a:blip>
-          <a:srcRect l="2381" t="16434" r="24926" b="6134"/>
+          <a:srcRect l="2684" t="15593" r="24475" b="5570"/>
           <a:stretch>
             <a:fillRect/>
           </a:stretch>
         </p:blipFill>
         <p:spPr>
           <a:xfrm>
-            <a:off x="1552892" y="3342294"/>
-            <a:ext cx="4943920" cy="2938726"/>
+            <a:off x="1552892" y="3800518"/>
+            <a:ext cx="3805492" cy="2316818"/>
           </a:xfrm>
           <a:prstGeom prst="rect">
             <a:avLst/>
